--- a/site/docs/presentaciones/parts/parte-8-capstones-completa.pptx
+++ b/site/docs/presentaciones/parts/parte-8-capstones-completa.pptx
@@ -5265,7 +5265,7 @@
                 </a:solidFill>
                 <a:latin typeface="Segoe UI"/>
               </a:rPr>
-              <a:t>Parte: 8 — Capstones · Fuente: Géron, Hands-On ML 3ª ed. cap. 14-15 + timm + PyTorch Lightning docs.  Duración estimada: 180 min.</a:t>
+              <a:t>Parte: 8 — Capstones · Fuente: Géron, Hands-On ML 3ª ed. cap. 14-15 + timm + PyTorch Lightning docs.  Duración estimada: 180 min. · Nivel: Avanzado</a:t>
             </a:r>
           </a:p>
         </p:txBody>
@@ -7569,7 +7569,7 @@
                 </a:solidFill>
                 <a:latin typeface="Segoe UI"/>
               </a:rPr>
-              <a:t>Parte: 8 — Capstones · Fuentes: Chip Huyen, How to build a data science portfolio + Eugene Yan, What I learned from looking at 200 ML portfolios + Mitchell et al., Model Cards for Model Reporting (FAT* 2019).  Duración estimada: 150 min.</a:t>
+              <a:t>Parte: 8 — Capstones · Fuentes: Chip Huyen, How to build a data science portfolio + Eugene Yan, What I learned from looking at 200 ML portfolios + Mitchell et al., Model Cards for Model Reporting (FAT* 2019).  Duración estimada: 150 min. · Nivel: Avanzado</a:t>
             </a:r>
           </a:p>
         </p:txBody>
@@ -10474,7 +10474,7 @@
                 </a:solidFill>
                 <a:latin typeface="Segoe UI"/>
               </a:rPr>
-              <a:t>Parte: 8 — Capstones · Fuente: integrador de Partes 0-7 + Huyen, C. Designing Machine Learning Systems (O'Reilly, 2022) caps. 4-7 + Géron, A. Hands-On ML, 3ª ed. caps. 2-3.  Duración estimada: 180 min.</a:t>
+              <a:t>Parte: 8 — Capstones · Fuente: integrador de Partes 0-7 + Huyen, C. Designing Machine Learning Systems (O'Reilly, 2022) caps. 4-7 + Géron, A. Hands-On ML, 3ª ed. caps. 2-3.  Duración estimada: 180 min. · Nivel: Avanzado</a:t>
             </a:r>
           </a:p>
         </p:txBody>
@@ -12778,7 +12778,7 @@
                 </a:solidFill>
                 <a:latin typeface="Segoe UI"/>
               </a:rPr>
-              <a:t>Parte: 8 — Capstones · Fuente: Hyndman &amp; Athanasopoulos, Forecasting: Principles and Practice (3ª ed.) + Hugging Face NLP course.  Duración estimada: 180 min.</a:t>
+              <a:t>Parte: 8 — Capstones · Fuente: Hyndman &amp; Athanasopoulos, Forecasting: Principles and Practice (3ª ed.) + Hugging Face NLP course.  Duración estimada: 180 min. · Nivel: Avanzado</a:t>
             </a:r>
           </a:p>
         </p:txBody>
